--- a/output/education/2026-03-24_family-medicine-orchestrator/family-medicine-orchestrator_slides.pptx
+++ b/output/education/2026-03-24_family-medicine-orchestrator/family-medicine-orchestrator_slides.pptx
@@ -3114,7 +3114,7 @@
         <p:spPr>
           <a:xfrm>
             <a:off x="731520" y="365760"/>
-            <a:ext cx="7680960" cy="731520"/>
+            <a:ext cx="7680960" cy="838200"/>
           </a:xfrm>
           <a:prstGeom prst="rect">
             <a:avLst/>
@@ -3136,6 +3136,7 @@
               </a:defRPr>
             </a:pPr>
             <a:r>
+              <a:rPr/>
               <a:t>Orchestrator</a:t>
             </a:r>
           </a:p>
@@ -3149,7 +3150,7 @@
         </p:nvSpPr>
         <p:spPr>
           <a:xfrm>
-            <a:off x="731520" y="1097280"/>
+            <a:off x="731520" y="1222248"/>
             <a:ext cx="7680960" cy="640080"/>
           </a:xfrm>
           <a:prstGeom prst="rect">
@@ -3172,6 +3173,7 @@
               </a:defRPr>
             </a:pPr>
             <a:r>
+              <a:rPr/>
               <a:t>オーケストレーターとしての家庭医</a:t>
             </a:r>
           </a:p>
@@ -3216,7 +3218,9 @@
           <a:bodyPr rtlCol="0" anchor="ctr"/>
           <a:lstStyle/>
           <a:p>
-            <a:pPr algn="ctr"/>
+            <a:pPr algn="ctr">
+              <a:defRPr/>
+            </a:pPr>
           </a:p>
         </p:txBody>
       </p:sp>
@@ -3251,6 +3255,7 @@
               </a:defRPr>
             </a:pPr>
             <a:r>
+              <a:rPr/>
               <a:t>AI研究が証明した「統合者」の価値</a:t>
             </a:r>
           </a:p>
@@ -3287,6 +3292,7 @@
               </a:defRPr>
             </a:pPr>
             <a:r>
+              <a:rPr/>
               <a:t>Google/MIT マルチエージェント研究 x 家庭医療のエビデンス</a:t>
             </a:r>
           </a:p>
@@ -3301,7 +3307,7 @@
         <p:spPr>
           <a:xfrm>
             <a:off x="731520" y="3200400"/>
-            <a:ext cx="2743200" cy="274320"/>
+            <a:ext cx="2743200" cy="287020"/>
           </a:xfrm>
           <a:prstGeom prst="rect">
             <a:avLst/>
@@ -3323,6 +3329,7 @@
               </a:defRPr>
             </a:pPr>
             <a:r>
+              <a:rPr/>
               <a:t>2026-03-24</a:t>
             </a:r>
           </a:p>
@@ -3363,7 +3370,7 @@
         <p:spPr>
           <a:xfrm>
             <a:off x="731520" y="274320"/>
-            <a:ext cx="7315200" cy="457200"/>
+            <a:ext cx="7315200" cy="518159"/>
           </a:xfrm>
           <a:prstGeom prst="rect">
             <a:avLst/>
@@ -3385,6 +3392,7 @@
               </a:defRPr>
             </a:pPr>
             <a:r>
+              <a:rPr/>
               <a:t>家庭医は「システムの専門医」である</a:t>
             </a:r>
           </a:p>
@@ -3705,7 +3713,9 @@
           <a:bodyPr rtlCol="0" anchor="ctr"/>
           <a:lstStyle/>
           <a:p>
-            <a:pPr algn="ctr"/>
+            <a:pPr algn="ctr">
+              <a:defRPr/>
+            </a:pPr>
           </a:p>
         </p:txBody>
       </p:sp>
@@ -3740,19 +3750,23 @@
               </a:defRPr>
             </a:pPr>
             <a:r>
+              <a:rPr/>
               <a:t>Google/MITが証明したこと:</a:t>
             </a:r>
             <a:br/>
             <a:r>
+              <a:rPr/>
               <a:t>「専門家の数」より「統合の質」が成果を決める。</a:t>
             </a:r>
             <a:br/>
             <a:br/>
             <a:r>
+              <a:rPr/>
               <a:t>家庭医は、「何でも診る医師」ではない。</a:t>
             </a:r>
             <a:br/>
             <a:r>
+              <a:rPr/>
               <a:t>「全体を見て、つないで、守る」システムの専門家だ。</a:t>
             </a:r>
           </a:p>
@@ -3793,7 +3807,7 @@
         <p:spPr>
           <a:xfrm>
             <a:off x="731520" y="274320"/>
-            <a:ext cx="7315200" cy="457200"/>
+            <a:ext cx="7315200" cy="518159"/>
           </a:xfrm>
           <a:prstGeom prst="rect">
             <a:avLst/>
@@ -3815,6 +3829,7 @@
               </a:defRPr>
             </a:pPr>
             <a:r>
+              <a:rPr/>
               <a:t>AIが証明したこと</a:t>
             </a:r>
           </a:p>
@@ -3828,8 +3843,8 @@
         </p:nvSpPr>
         <p:spPr>
           <a:xfrm>
-            <a:off x="731520" y="731520"/>
-            <a:ext cx="5486400" cy="274320"/>
+            <a:off x="731520" y="810767"/>
+            <a:ext cx="5486400" cy="287020"/>
           </a:xfrm>
           <a:prstGeom prst="rect">
             <a:avLst/>
@@ -3851,6 +3866,7 @@
               </a:defRPr>
             </a:pPr>
             <a:r>
+              <a:rPr/>
               <a:t>Google / MIT / DeepMind 共同研究 (2025-2026)</a:t>
             </a:r>
           </a:p>
@@ -3865,7 +3881,7 @@
         <p:spPr>
           <a:xfrm>
             <a:off x="731520" y="914400"/>
-            <a:ext cx="7680960" cy="274320"/>
+            <a:ext cx="7680960" cy="287020"/>
           </a:xfrm>
           <a:prstGeom prst="rect">
             <a:avLst/>
@@ -3887,6 +3903,7 @@
               </a:defRPr>
             </a:pPr>
             <a:r>
+              <a:rPr/>
               <a:t>単一AIのエラー率を 1 としたとき、専門AIを增やすと…</a:t>
             </a:r>
           </a:p>
@@ -3933,7 +3950,9 @@
           <a:bodyPr rtlCol="0" anchor="ctr"/>
           <a:lstStyle/>
           <a:p>
-            <a:pPr algn="ctr"/>
+            <a:pPr algn="ctr">
+              <a:defRPr/>
+            </a:pPr>
           </a:p>
         </p:txBody>
       </p:sp>
@@ -3946,7 +3965,7 @@
         <p:spPr>
           <a:xfrm>
             <a:off x="868680" y="1325880"/>
-            <a:ext cx="3383280" cy="274320"/>
+            <a:ext cx="3383280" cy="322579"/>
           </a:xfrm>
           <a:prstGeom prst="rect">
             <a:avLst/>
@@ -3968,6 +3987,7 @@
               </a:defRPr>
             </a:pPr>
             <a:r>
+              <a:rPr/>
               <a:t>統合者なし（Bag of Agents）</a:t>
             </a:r>
           </a:p>
@@ -3981,8 +4001,8 @@
         </p:nvSpPr>
         <p:spPr>
           <a:xfrm>
-            <a:off x="868680" y="1600200"/>
-            <a:ext cx="3383280" cy="457200"/>
+            <a:off x="868680" y="1666747"/>
+            <a:ext cx="3383280" cy="624840"/>
           </a:xfrm>
           <a:prstGeom prst="rect">
             <a:avLst/>
@@ -4004,6 +4024,7 @@
               </a:defRPr>
             </a:pPr>
             <a:r>
+              <a:rPr/>
               <a:t>エラー 17倍に增幅</a:t>
             </a:r>
           </a:p>
@@ -4017,7 +4038,7 @@
         </p:nvSpPr>
         <p:spPr>
           <a:xfrm>
-            <a:off x="868680" y="2148840"/>
+            <a:off x="868680" y="2309875"/>
             <a:ext cx="3383280" cy="640080"/>
           </a:xfrm>
           <a:prstGeom prst="rect">
@@ -4040,10 +4061,12 @@
               </a:defRPr>
             </a:pPr>
             <a:r>
+              <a:rPr/>
               <a:t>専門家が個別に動くと</a:t>
             </a:r>
             <a:br/>
             <a:r>
+              <a:rPr/>
               <a:t>矛盾・重複・欠落が雪だるま式</a:t>
             </a:r>
           </a:p>
@@ -4090,7 +4113,9 @@
           <a:bodyPr rtlCol="0" anchor="ctr"/>
           <a:lstStyle/>
           <a:p>
-            <a:pPr algn="ctr"/>
+            <a:pPr algn="ctr">
+              <a:defRPr/>
+            </a:pPr>
           </a:p>
         </p:txBody>
       </p:sp>
@@ -4103,7 +4128,7 @@
         <p:spPr>
           <a:xfrm>
             <a:off x="4892040" y="1325880"/>
-            <a:ext cx="3383280" cy="274320"/>
+            <a:ext cx="3383280" cy="322579"/>
           </a:xfrm>
           <a:prstGeom prst="rect">
             <a:avLst/>
@@ -4125,6 +4150,7 @@
               </a:defRPr>
             </a:pPr>
             <a:r>
+              <a:rPr/>
               <a:t>統合者あり（Orchestrated）</a:t>
             </a:r>
           </a:p>
@@ -4138,8 +4164,8 @@
         </p:nvSpPr>
         <p:spPr>
           <a:xfrm>
-            <a:off x="4892040" y="1600200"/>
-            <a:ext cx="3383280" cy="457200"/>
+            <a:off x="4892040" y="1666747"/>
+            <a:ext cx="3383280" cy="624840"/>
           </a:xfrm>
           <a:prstGeom prst="rect">
             <a:avLst/>
@@ -4161,6 +4187,7 @@
               </a:defRPr>
             </a:pPr>
             <a:r>
+              <a:rPr/>
               <a:t>エラー 4倍に抑制</a:t>
             </a:r>
           </a:p>
@@ -4174,7 +4201,7 @@
         </p:nvSpPr>
         <p:spPr>
           <a:xfrm>
-            <a:off x="4892040" y="2148840"/>
+            <a:off x="4892040" y="2309875"/>
             <a:ext cx="3383280" cy="640080"/>
           </a:xfrm>
           <a:prstGeom prst="rect">
@@ -4197,10 +4224,12 @@
               </a:defRPr>
             </a:pPr>
             <a:r>
+              <a:rPr/>
               <a:t>統合者が全体を調整すると</a:t>
             </a:r>
             <a:br/>
             <a:r>
+              <a:rPr/>
               <a:t>エラーの增幅を約75%抑制</a:t>
             </a:r>
           </a:p>
@@ -4245,7 +4274,9 @@
           <a:bodyPr rtlCol="0" anchor="ctr"/>
           <a:lstStyle/>
           <a:p>
-            <a:pPr algn="ctr"/>
+            <a:pPr algn="ctr">
+              <a:defRPr/>
+            </a:pPr>
           </a:p>
         </p:txBody>
       </p:sp>
@@ -4280,10 +4311,12 @@
               </a:defRPr>
             </a:pPr>
             <a:r>
+              <a:rPr/>
               <a:t>「専門家の数」より「調整の構造」が重要。</a:t>
             </a:r>
             <a:br/>
             <a:r>
+              <a:rPr/>
               <a:t>これは、まさに医療の話だ。</a:t>
             </a:r>
           </a:p>
@@ -4324,7 +4357,7 @@
         <p:spPr>
           <a:xfrm>
             <a:off x="731520" y="274320"/>
-            <a:ext cx="7315200" cy="457200"/>
+            <a:ext cx="7315200" cy="518159"/>
           </a:xfrm>
           <a:prstGeom prst="rect">
             <a:avLst/>
@@ -4346,6 +4379,7 @@
               </a:defRPr>
             </a:pPr>
             <a:r>
+              <a:rPr/>
               <a:t>AIの発見 = 医療の現実</a:t>
             </a:r>
           </a:p>
@@ -4718,7 +4752,9 @@
           <a:bodyPr rtlCol="0" anchor="ctr"/>
           <a:lstStyle/>
           <a:p>
-            <a:pPr algn="ctr"/>
+            <a:pPr algn="ctr">
+              <a:defRPr/>
+            </a:pPr>
           </a:p>
         </p:txBody>
       </p:sp>
@@ -4763,7 +4799,9 @@
           <a:bodyPr rtlCol="0" anchor="ctr"/>
           <a:lstStyle/>
           <a:p>
-            <a:pPr algn="ctr"/>
+            <a:pPr algn="ctr">
+              <a:defRPr/>
+            </a:pPr>
           </a:p>
         </p:txBody>
       </p:sp>
@@ -4798,18 +4836,22 @@
               </a:defRPr>
             </a:pPr>
             <a:r>
+              <a:rPr/>
               <a:t>1975年、日野原重明が「プライマリケアのニードはきわめて高い」と意見具申。</a:t>
             </a:r>
             <a:br/>
             <a:r>
+              <a:rPr/>
               <a:t>2004年、岩崎榄が「分化ばかり進んで統合がなおざり」と指摘。</a:t>
             </a:r>
             <a:br/>
             <a:r>
+              <a:rPr/>
               <a:t>2009年、Huttが「患者のオーケストラの指揮者がいない」と論考。</a:t>
             </a:r>
             <a:br/>
             <a:r>
+              <a:rPr/>
               <a:t>→ 50年間の警告が、2026年のAI研究で科学的に裏付けられた。</a:t>
             </a:r>
           </a:p>
@@ -4850,7 +4892,7 @@
         <p:spPr>
           <a:xfrm>
             <a:off x="731520" y="274320"/>
-            <a:ext cx="7315200" cy="457200"/>
+            <a:ext cx="7315200" cy="518159"/>
           </a:xfrm>
           <a:prstGeom prst="rect">
             <a:avLst/>
@@ -4872,6 +4914,7 @@
               </a:defRPr>
             </a:pPr>
             <a:r>
+              <a:rPr/>
               <a:t>日本の現実 — 数字が語る断片化</a:t>
             </a:r>
           </a:p>
@@ -4918,7 +4961,9 @@
           <a:bodyPr rtlCol="0" anchor="ctr"/>
           <a:lstStyle/>
           <a:p>
-            <a:pPr algn="ctr"/>
+            <a:pPr algn="ctr">
+              <a:defRPr/>
+            </a:pPr>
           </a:p>
         </p:txBody>
       </p:sp>
@@ -4961,7 +5006,9 @@
           <a:bodyPr rtlCol="0" anchor="ctr"/>
           <a:lstStyle/>
           <a:p>
-            <a:pPr algn="ctr"/>
+            <a:pPr algn="ctr">
+              <a:defRPr/>
+            </a:pPr>
           </a:p>
         </p:txBody>
       </p:sp>
@@ -4974,7 +5021,7 @@
         <p:spPr>
           <a:xfrm>
             <a:off x="548640" y="868680"/>
-            <a:ext cx="1783080" cy="502920"/>
+            <a:ext cx="1783080" cy="589279"/>
           </a:xfrm>
           <a:prstGeom prst="rect">
             <a:avLst/>
@@ -4996,6 +5043,7 @@
               </a:defRPr>
             </a:pPr>
             <a:r>
+              <a:rPr/>
               <a:t>0.3%</a:t>
             </a:r>
           </a:p>
@@ -5009,7 +5057,7 @@
         </p:nvSpPr>
         <p:spPr>
           <a:xfrm>
-            <a:off x="548640" y="1371600"/>
+            <a:off x="548640" y="1476247"/>
             <a:ext cx="1783080" cy="548640"/>
           </a:xfrm>
           <a:prstGeom prst="rect">
@@ -5032,10 +5080,12 @@
               </a:defRPr>
             </a:pPr>
             <a:r>
+              <a:rPr/>
               <a:t>全医師に対する</a:t>
             </a:r>
             <a:br/>
             <a:r>
+              <a:rPr/>
               <a:t>家庭医の割合</a:t>
             </a:r>
           </a:p>
@@ -5049,7 +5099,7 @@
         </p:nvSpPr>
         <p:spPr>
           <a:xfrm>
-            <a:off x="548640" y="2011680"/>
+            <a:off x="548640" y="2043175"/>
             <a:ext cx="1783080" cy="640080"/>
           </a:xfrm>
           <a:prstGeom prst="rect">
@@ -5072,10 +5122,12 @@
               </a:defRPr>
             </a:pPr>
             <a:r>
+              <a:rPr/>
               <a:t>1,126人 / 339,623人</a:t>
             </a:r>
             <a:br/>
             <a:r>
+              <a:rPr/>
               <a:t>(2022年)</a:t>
             </a:r>
           </a:p>
@@ -5122,7 +5174,9 @@
           <a:bodyPr rtlCol="0" anchor="ctr"/>
           <a:lstStyle/>
           <a:p>
-            <a:pPr algn="ctr"/>
+            <a:pPr algn="ctr">
+              <a:defRPr/>
+            </a:pPr>
           </a:p>
         </p:txBody>
       </p:sp>
@@ -5165,7 +5219,9 @@
           <a:bodyPr rtlCol="0" anchor="ctr"/>
           <a:lstStyle/>
           <a:p>
-            <a:pPr algn="ctr"/>
+            <a:pPr algn="ctr">
+              <a:defRPr/>
+            </a:pPr>
           </a:p>
         </p:txBody>
       </p:sp>
@@ -5178,7 +5234,7 @@
         <p:spPr>
           <a:xfrm>
             <a:off x="2697480" y="868680"/>
-            <a:ext cx="1783080" cy="502920"/>
+            <a:ext cx="1783080" cy="589279"/>
           </a:xfrm>
           <a:prstGeom prst="rect">
             <a:avLst/>
@@ -5200,6 +5256,7 @@
               </a:defRPr>
             </a:pPr>
             <a:r>
+              <a:rPr/>
               <a:t>65.3%</a:t>
             </a:r>
           </a:p>
@@ -5213,7 +5270,7 @@
         </p:nvSpPr>
         <p:spPr>
           <a:xfrm>
-            <a:off x="2697480" y="1371600"/>
+            <a:off x="2697480" y="1476247"/>
             <a:ext cx="1783080" cy="548640"/>
           </a:xfrm>
           <a:prstGeom prst="rect">
@@ -5236,10 +5293,12 @@
               </a:defRPr>
             </a:pPr>
             <a:r>
+              <a:rPr/>
               <a:t>高齢者の</a:t>
             </a:r>
             <a:br/>
             <a:r>
+              <a:rPr/>
               <a:t>ポリドクタリング率</a:t>
             </a:r>
           </a:p>
@@ -5253,7 +5312,7 @@
         </p:nvSpPr>
         <p:spPr>
           <a:xfrm>
-            <a:off x="2697480" y="2011680"/>
+            <a:off x="2697480" y="2043175"/>
             <a:ext cx="1783080" cy="640080"/>
           </a:xfrm>
           <a:prstGeom prst="rect">
@@ -5276,10 +5335,12 @@
               </a:defRPr>
             </a:pPr>
             <a:r>
+              <a:rPr/>
               <a:t>複数施設を定期受診</a:t>
             </a:r>
             <a:br/>
             <a:r>
+              <a:rPr/>
               <a:t>(平均併存疾患4.7)</a:t>
             </a:r>
           </a:p>
@@ -5326,7 +5387,9 @@
           <a:bodyPr rtlCol="0" anchor="ctr"/>
           <a:lstStyle/>
           <a:p>
-            <a:pPr algn="ctr"/>
+            <a:pPr algn="ctr">
+              <a:defRPr/>
+            </a:pPr>
           </a:p>
         </p:txBody>
       </p:sp>
@@ -5369,7 +5432,9 @@
           <a:bodyPr rtlCol="0" anchor="ctr"/>
           <a:lstStyle/>
           <a:p>
-            <a:pPr algn="ctr"/>
+            <a:pPr algn="ctr">
+              <a:defRPr/>
+            </a:pPr>
           </a:p>
         </p:txBody>
       </p:sp>
@@ -5382,7 +5447,7 @@
         <p:spPr>
           <a:xfrm>
             <a:off x="4846320" y="868680"/>
-            <a:ext cx="1783080" cy="502920"/>
+            <a:ext cx="1783080" cy="589279"/>
           </a:xfrm>
           <a:prstGeom prst="rect">
             <a:avLst/>
@@ -5404,6 +5469,7 @@
               </a:defRPr>
             </a:pPr>
             <a:r>
+              <a:rPr/>
               <a:t>2.18倍</a:t>
             </a:r>
           </a:p>
@@ -5417,7 +5483,7 @@
         </p:nvSpPr>
         <p:spPr>
           <a:xfrm>
-            <a:off x="4846320" y="1371600"/>
+            <a:off x="4846320" y="1476247"/>
             <a:ext cx="1783080" cy="548640"/>
           </a:xfrm>
           <a:prstGeom prst="rect">
@@ -5440,10 +5506,12 @@
               </a:defRPr>
             </a:pPr>
             <a:r>
+              <a:rPr/>
               <a:t>ポリファーマシー</a:t>
             </a:r>
             <a:br/>
             <a:r>
+              <a:rPr/>
               <a:t>のリスク</a:t>
             </a:r>
           </a:p>
@@ -5457,7 +5525,7 @@
         </p:nvSpPr>
         <p:spPr>
           <a:xfrm>
-            <a:off x="4846320" y="2011680"/>
+            <a:off x="4846320" y="2043175"/>
             <a:ext cx="1783080" cy="640080"/>
           </a:xfrm>
           <a:prstGeom prst="rect">
@@ -5480,10 +5548,12 @@
               </a:defRPr>
             </a:pPr>
             <a:r>
+              <a:rPr/>
               <a:t>3施設以上受診時</a:t>
             </a:r>
             <a:br/>
             <a:r>
+              <a:rPr/>
               <a:t>(OR 2.18)</a:t>
             </a:r>
           </a:p>
@@ -5530,7 +5600,9 @@
           <a:bodyPr rtlCol="0" anchor="ctr"/>
           <a:lstStyle/>
           <a:p>
-            <a:pPr algn="ctr"/>
+            <a:pPr algn="ctr">
+              <a:defRPr/>
+            </a:pPr>
           </a:p>
         </p:txBody>
       </p:sp>
@@ -5573,7 +5645,9 @@
           <a:bodyPr rtlCol="0" anchor="ctr"/>
           <a:lstStyle/>
           <a:p>
-            <a:pPr algn="ctr"/>
+            <a:pPr algn="ctr">
+              <a:defRPr/>
+            </a:pPr>
           </a:p>
         </p:txBody>
       </p:sp>
@@ -5586,7 +5660,7 @@
         <p:spPr>
           <a:xfrm>
             <a:off x="6995160" y="868680"/>
-            <a:ext cx="1783080" cy="502920"/>
+            <a:ext cx="1783080" cy="589279"/>
           </a:xfrm>
           <a:prstGeom prst="rect">
             <a:avLst/>
@@ -5608,6 +5682,7 @@
               </a:defRPr>
             </a:pPr>
             <a:r>
+              <a:rPr/>
               <a:t>2倍</a:t>
             </a:r>
           </a:p>
@@ -5621,7 +5696,7 @@
         </p:nvSpPr>
         <p:spPr>
           <a:xfrm>
-            <a:off x="6995160" y="1371600"/>
+            <a:off x="6995160" y="1476247"/>
             <a:ext cx="1783080" cy="548640"/>
           </a:xfrm>
           <a:prstGeom prst="rect">
@@ -5644,10 +5719,12 @@
               </a:defRPr>
             </a:pPr>
             <a:r>
+              <a:rPr/>
               <a:t>外来医療費の</a:t>
             </a:r>
             <a:br/>
             <a:r>
+              <a:rPr/>
               <a:t>増加</a:t>
             </a:r>
           </a:p>
@@ -5661,7 +5738,7 @@
         </p:nvSpPr>
         <p:spPr>
           <a:xfrm>
-            <a:off x="6995160" y="2011680"/>
+            <a:off x="6995160" y="2043175"/>
             <a:ext cx="1783080" cy="640080"/>
           </a:xfrm>
           <a:prstGeom prst="rect">
@@ -5684,10 +5761,12 @@
               </a:defRPr>
             </a:pPr>
             <a:r>
+              <a:rPr/>
               <a:t>3施設以上受診時</a:t>
             </a:r>
             <a:br/>
             <a:r>
+              <a:rPr/>
               <a:t>vs 1施設</a:t>
             </a:r>
           </a:p>
@@ -5724,6 +5803,7 @@
               </a:defRPr>
             </a:pPr>
             <a:r>
+              <a:rPr/>
               <a:t>出典: PMC (2023), BMC Health Services Research (2020), Scientific Reports (2025)</a:t>
             </a:r>
           </a:p>
@@ -5764,7 +5844,7 @@
         <p:spPr>
           <a:xfrm>
             <a:off x="731520" y="274320"/>
-            <a:ext cx="7315200" cy="457200"/>
+            <a:ext cx="7315200" cy="518159"/>
           </a:xfrm>
           <a:prstGeom prst="rect">
             <a:avLst/>
@@ -5786,6 +5866,7 @@
               </a:defRPr>
             </a:pPr>
             <a:r>
+              <a:rPr/>
               <a:t>スターフィールドのエビデンス</a:t>
             </a:r>
           </a:p>
@@ -5799,8 +5880,8 @@
         </p:nvSpPr>
         <p:spPr>
           <a:xfrm>
-            <a:off x="731520" y="731520"/>
-            <a:ext cx="7315200" cy="274320"/>
+            <a:off x="731520" y="810767"/>
+            <a:ext cx="7315200" cy="287020"/>
           </a:xfrm>
           <a:prstGeom prst="rect">
             <a:avLst/>
@@ -5822,6 +5903,7 @@
               </a:defRPr>
             </a:pPr>
             <a:r>
+              <a:rPr/>
               <a:t>Barbara Starfield (Johns Hopkins, 2005) — プライマリケアの定量的証明</a:t>
             </a:r>
           </a:p>
@@ -5868,7 +5950,9 @@
           <a:bodyPr rtlCol="0" anchor="ctr"/>
           <a:lstStyle/>
           <a:p>
-            <a:pPr algn="ctr"/>
+            <a:pPr algn="ctr">
+              <a:defRPr/>
+            </a:pPr>
           </a:p>
         </p:txBody>
       </p:sp>
@@ -5911,7 +5995,9 @@
           <a:bodyPr rtlCol="0" anchor="ctr"/>
           <a:lstStyle/>
           <a:p>
-            <a:pPr algn="ctr"/>
+            <a:pPr algn="ctr">
+              <a:defRPr/>
+            </a:pPr>
           </a:p>
         </p:txBody>
       </p:sp>
@@ -5946,10 +6032,12 @@
               </a:defRPr>
             </a:pPr>
             <a:r>
+              <a:rPr/>
               <a:t>プライマリケア医</a:t>
             </a:r>
             <a:br/>
             <a:r>
+              <a:rPr/>
               <a:t>1人/万人 ↑</a:t>
             </a:r>
           </a:p>
@@ -5986,6 +6074,7 @@
               </a:defRPr>
             </a:pPr>
             <a:r>
+              <a:rPr/>
               <a:t>死亡率 5.3%↓</a:t>
             </a:r>
           </a:p>
@@ -6022,10 +6111,12 @@
               </a:defRPr>
             </a:pPr>
             <a:r>
+              <a:rPr/>
               <a:t>年間49人/10万人の</a:t>
             </a:r>
             <a:br/>
             <a:r>
+              <a:rPr/>
               <a:t>命が救われる</a:t>
             </a:r>
           </a:p>
@@ -6072,7 +6163,9 @@
           <a:bodyPr rtlCol="0" anchor="ctr"/>
           <a:lstStyle/>
           <a:p>
-            <a:pPr algn="ctr"/>
+            <a:pPr algn="ctr">
+              <a:defRPr/>
+            </a:pPr>
           </a:p>
         </p:txBody>
       </p:sp>
@@ -6115,7 +6208,9 @@
           <a:bodyPr rtlCol="0" anchor="ctr"/>
           <a:lstStyle/>
           <a:p>
-            <a:pPr algn="ctr"/>
+            <a:pPr algn="ctr">
+              <a:defRPr/>
+            </a:pPr>
           </a:p>
         </p:txBody>
       </p:sp>
@@ -6150,10 +6245,12 @@
               </a:defRPr>
             </a:pPr>
             <a:r>
+              <a:rPr/>
               <a:t>プライマリケア</a:t>
             </a:r>
             <a:br/>
             <a:r>
+              <a:rPr/>
               <a:t>スコア 5点↑</a:t>
             </a:r>
           </a:p>
@@ -6190,10 +6287,12 @@
               </a:defRPr>
             </a:pPr>
             <a:r>
+              <a:rPr/>
               <a:t>心疾患早死</a:t>
             </a:r>
             <a:br/>
             <a:r>
+              <a:rPr/>
               <a:t>最大15%↓</a:t>
             </a:r>
           </a:p>
@@ -6230,10 +6329,12 @@
               </a:defRPr>
             </a:pPr>
             <a:r>
+              <a:rPr/>
               <a:t>営入気管炎による</a:t>
             </a:r>
             <a:br/>
             <a:r>
+              <a:rPr/>
               <a:t>早死も6.5%↓</a:t>
             </a:r>
           </a:p>
@@ -6280,7 +6381,9 @@
           <a:bodyPr rtlCol="0" anchor="ctr"/>
           <a:lstStyle/>
           <a:p>
-            <a:pPr algn="ctr"/>
+            <a:pPr algn="ctr">
+              <a:defRPr/>
+            </a:pPr>
           </a:p>
         </p:txBody>
       </p:sp>
@@ -6323,7 +6426,9 @@
           <a:bodyPr rtlCol="0" anchor="ctr"/>
           <a:lstStyle/>
           <a:p>
-            <a:pPr algn="ctr"/>
+            <a:pPr algn="ctr">
+              <a:defRPr/>
+            </a:pPr>
           </a:p>
         </p:txBody>
       </p:sp>
@@ -6358,6 +6463,7 @@
               </a:defRPr>
             </a:pPr>
             <a:r>
+              <a:rPr/>
               <a:t>米国での試算</a:t>
             </a:r>
           </a:p>
@@ -6394,10 +6500,12 @@
               </a:defRPr>
             </a:pPr>
             <a:r>
+              <a:rPr/>
               <a:t>年間12.8万人</a:t>
             </a:r>
             <a:br/>
             <a:r>
+              <a:rPr/>
               <a:t>の死亡を予防可能</a:t>
             </a:r>
           </a:p>
@@ -6434,10 +6542,12 @@
               </a:defRPr>
             </a:pPr>
             <a:r>
+              <a:rPr/>
               <a:t>プライマリケアを</a:t>
             </a:r>
             <a:br/>
             <a:r>
+              <a:rPr/>
               <a:t>充実させることで</a:t>
             </a:r>
           </a:p>
@@ -6474,6 +6584,7 @@
               </a:defRPr>
             </a:pPr>
             <a:r>
+              <a:rPr/>
               <a:t>出典: Milbank Quarterly (2005), Macinko et al. (2007) — PMC2690145</a:t>
             </a:r>
           </a:p>
@@ -6514,7 +6625,7 @@
         <p:spPr>
           <a:xfrm>
             <a:off x="731520" y="274320"/>
-            <a:ext cx="7315200" cy="457200"/>
+            <a:ext cx="7315200" cy="518159"/>
           </a:xfrm>
           <a:prstGeom prst="rect">
             <a:avLst/>
@@ -6536,6 +6647,7 @@
               </a:defRPr>
             </a:pPr>
             <a:r>
+              <a:rPr/>
               <a:t>世界の「オーケストレーター」モデル</a:t>
             </a:r>
           </a:p>
@@ -7489,7 +7601,9 @@
           <a:bodyPr rtlCol="0" anchor="ctr"/>
           <a:lstStyle/>
           <a:p>
-            <a:pPr algn="ctr"/>
+            <a:pPr algn="ctr">
+              <a:defRPr/>
+            </a:pPr>
           </a:p>
         </p:txBody>
       </p:sp>
@@ -7534,7 +7648,9 @@
           <a:bodyPr rtlCol="0" anchor="ctr"/>
           <a:lstStyle/>
           <a:p>
-            <a:pPr algn="ctr"/>
+            <a:pPr algn="ctr">
+              <a:defRPr/>
+            </a:pPr>
           </a:p>
         </p:txBody>
       </p:sp>
@@ -7569,14 +7685,17 @@
               </a:defRPr>
             </a:pPr>
             <a:r>
+              <a:rPr/>
               <a:t>ゲートキーパー = AIの「オーケストレーター検証ゲート」。</a:t>
             </a:r>
             <a:br/>
             <a:r>
+              <a:rPr/>
               <a:t>家庭医を通さないと専門医に行けない仕組みが、</a:t>
             </a:r>
             <a:br/>
             <a:r>
+              <a:rPr/>
               <a:t>構造的に不要な受診を抑制し、ケアの質を上げる。</a:t>
             </a:r>
           </a:p>
@@ -7617,7 +7736,7 @@
         <p:spPr>
           <a:xfrm>
             <a:off x="731520" y="274320"/>
-            <a:ext cx="7315200" cy="457200"/>
+            <a:ext cx="7315200" cy="518159"/>
           </a:xfrm>
           <a:prstGeom prst="rect">
             <a:avLst/>
@@ -7639,6 +7758,7 @@
               </a:defRPr>
             </a:pPr>
             <a:r>
+              <a:rPr/>
               <a:t>なぜ「統合者」が必要なのか</a:t>
             </a:r>
           </a:p>
@@ -7685,7 +7805,9 @@
           <a:bodyPr rtlCol="0" anchor="ctr"/>
           <a:lstStyle/>
           <a:p>
-            <a:pPr algn="ctr"/>
+            <a:pPr algn="ctr">
+              <a:defRPr/>
+            </a:pPr>
           </a:p>
         </p:txBody>
       </p:sp>
@@ -7698,7 +7820,7 @@
         <p:spPr>
           <a:xfrm>
             <a:off x="868680" y="960120"/>
-            <a:ext cx="3383280" cy="274320"/>
+            <a:ext cx="3383280" cy="322579"/>
           </a:xfrm>
           <a:prstGeom prst="rect">
             <a:avLst/>
@@ -7720,6 +7842,7 @@
               </a:defRPr>
             </a:pPr>
             <a:r>
+              <a:rPr/>
               <a:t>断片化したケア</a:t>
             </a:r>
           </a:p>
@@ -7733,7 +7856,7 @@
         </p:nvSpPr>
         <p:spPr>
           <a:xfrm>
-            <a:off x="868680" y="1280160"/>
+            <a:off x="868680" y="1300987"/>
             <a:ext cx="3383280" cy="2194560"/>
           </a:xfrm>
           <a:prstGeom prst="rect">
@@ -7756,31 +7879,38 @@
               </a:defRPr>
             </a:pPr>
             <a:r>
+              <a:rPr/>
               <a:t>  患者</a:t>
             </a:r>
             <a:br/>
             <a:r>
+              <a:rPr/>
               <a:t>    ├── 循環器内科</a:t>
             </a:r>
             <a:br/>
             <a:r>
+              <a:rPr/>
               <a:t>    ├── 整形外科</a:t>
             </a:r>
             <a:br/>
             <a:r>
+              <a:rPr/>
               <a:t>    ├── 糖尿病内科</a:t>
             </a:r>
             <a:br/>
             <a:r>
+              <a:rPr/>
               <a:t>    ├── 眼科</a:t>
             </a:r>
             <a:br/>
             <a:r>
+              <a:rPr/>
               <a:t>    └── 精神科</a:t>
             </a:r>
             <a:br/>
             <a:br/>
             <a:r>
+              <a:rPr/>
               <a:t>  → 誰が全体を見る？</a:t>
             </a:r>
           </a:p>
@@ -7827,7 +7957,9 @@
           <a:bodyPr rtlCol="0" anchor="ctr"/>
           <a:lstStyle/>
           <a:p>
-            <a:pPr algn="ctr"/>
+            <a:pPr algn="ctr">
+              <a:defRPr/>
+            </a:pPr>
           </a:p>
         </p:txBody>
       </p:sp>
@@ -7840,7 +7972,7 @@
         <p:spPr>
           <a:xfrm>
             <a:off x="4892040" y="960120"/>
-            <a:ext cx="3383280" cy="274320"/>
+            <a:ext cx="3383280" cy="322579"/>
           </a:xfrm>
           <a:prstGeom prst="rect">
             <a:avLst/>
@@ -7862,6 +7994,7 @@
               </a:defRPr>
             </a:pPr>
             <a:r>
+              <a:rPr/>
               <a:t>統合されたケア</a:t>
             </a:r>
           </a:p>
@@ -7875,7 +8008,7 @@
         </p:nvSpPr>
         <p:spPr>
           <a:xfrm>
-            <a:off x="4892040" y="1280160"/>
+            <a:off x="4892040" y="1300987"/>
             <a:ext cx="3383280" cy="2194560"/>
           </a:xfrm>
           <a:prstGeom prst="rect">
@@ -7898,31 +8031,38 @@
               </a:defRPr>
             </a:pPr>
             <a:r>
+              <a:rPr/>
               <a:t>  患者</a:t>
             </a:r>
             <a:br/>
             <a:r>
+              <a:rPr/>
               <a:t>    └── 家庭医（統合者）</a:t>
             </a:r>
             <a:br/>
             <a:r>
+              <a:rPr/>
               <a:t>          ├── 循環器内科</a:t>
             </a:r>
             <a:br/>
             <a:r>
+              <a:rPr/>
               <a:t>          ├── 整形外科</a:t>
             </a:r>
             <a:br/>
             <a:r>
+              <a:rPr/>
               <a:t>          ├── 糖尿病内科</a:t>
             </a:r>
             <a:br/>
             <a:r>
+              <a:rPr/>
               <a:t>          └── (必要なときだけ)</a:t>
             </a:r>
             <a:br/>
             <a:br/>
             <a:r>
+              <a:rPr/>
               <a:t>  → 全体を見る人がいる</a:t>
             </a:r>
           </a:p>
@@ -7959,6 +8099,7 @@
               </a:defRPr>
             </a:pPr>
             <a:r>
+              <a:rPr/>
               <a:t>AIも医療も同じ結論: 「専門家の数」ではなく「調整の構造」が質を決める</a:t>
             </a:r>
           </a:p>
@@ -7999,7 +8140,7 @@
         <p:spPr>
           <a:xfrm>
             <a:off x="731520" y="274320"/>
-            <a:ext cx="7315200" cy="457200"/>
+            <a:ext cx="7315200" cy="518159"/>
           </a:xfrm>
           <a:prstGeom prst="rect">
             <a:avLst/>
@@ -8021,6 +8162,7 @@
               </a:defRPr>
             </a:pPr>
             <a:r>
+              <a:rPr/>
               <a:t>スターフィールドの4つの柱</a:t>
             </a:r>
           </a:p>
@@ -8034,8 +8176,8 @@
         </p:nvSpPr>
         <p:spPr>
           <a:xfrm>
-            <a:off x="731520" y="685800"/>
-            <a:ext cx="5486400" cy="274320"/>
+            <a:off x="731520" y="810767"/>
+            <a:ext cx="5486400" cy="304799"/>
           </a:xfrm>
           <a:prstGeom prst="rect">
             <a:avLst/>
@@ -8057,6 +8199,7 @@
               </a:defRPr>
             </a:pPr>
             <a:r>
+              <a:rPr/>
               <a:t>強いプライマリケア = この4つが揃っている</a:t>
             </a:r>
           </a:p>
@@ -8103,7 +8246,9 @@
           <a:bodyPr rtlCol="0" anchor="ctr"/>
           <a:lstStyle/>
           <a:p>
-            <a:pPr algn="ctr"/>
+            <a:pPr algn="ctr">
+              <a:defRPr/>
+            </a:pPr>
           </a:p>
         </p:txBody>
       </p:sp>
@@ -8146,7 +8291,9 @@
           <a:bodyPr rtlCol="0" anchor="ctr"/>
           <a:lstStyle/>
           <a:p>
-            <a:pPr algn="ctr"/>
+            <a:pPr algn="ctr">
+              <a:defRPr/>
+            </a:pPr>
           </a:p>
         </p:txBody>
       </p:sp>
@@ -8158,7 +8305,7 @@
         </p:nvSpPr>
         <p:spPr>
           <a:xfrm>
-            <a:off x="548640" y="1097280"/>
+            <a:off x="548640" y="1133854"/>
             <a:ext cx="1783080" cy="640080"/>
           </a:xfrm>
           <a:prstGeom prst="rect">
@@ -8181,10 +8328,12 @@
               </a:defRPr>
             </a:pPr>
             <a:r>
+              <a:rPr/>
               <a:t>First Contact</a:t>
             </a:r>
             <a:br/>
             <a:r>
+              <a:rPr/>
               <a:t>最初の窓口</a:t>
             </a:r>
           </a:p>
@@ -8221,10 +8370,12 @@
               </a:defRPr>
             </a:pPr>
             <a:r>
+              <a:rPr/>
               <a:t>患者が最初に相談する</a:t>
             </a:r>
             <a:br/>
             <a:r>
+              <a:rPr/>
               <a:t>場所がある</a:t>
             </a:r>
           </a:p>
@@ -8271,7 +8422,9 @@
           <a:bodyPr rtlCol="0" anchor="ctr"/>
           <a:lstStyle/>
           <a:p>
-            <a:pPr algn="ctr"/>
+            <a:pPr algn="ctr">
+              <a:defRPr/>
+            </a:pPr>
           </a:p>
         </p:txBody>
       </p:sp>
@@ -8314,7 +8467,9 @@
           <a:bodyPr rtlCol="0" anchor="ctr"/>
           <a:lstStyle/>
           <a:p>
-            <a:pPr algn="ctr"/>
+            <a:pPr algn="ctr">
+              <a:defRPr/>
+            </a:pPr>
           </a:p>
         </p:txBody>
       </p:sp>
@@ -8326,7 +8481,7 @@
         </p:nvSpPr>
         <p:spPr>
           <a:xfrm>
-            <a:off x="2697480" y="1097280"/>
+            <a:off x="2697480" y="1133854"/>
             <a:ext cx="1783080" cy="640080"/>
           </a:xfrm>
           <a:prstGeom prst="rect">
@@ -8349,10 +8504,12 @@
               </a:defRPr>
             </a:pPr>
             <a:r>
+              <a:rPr/>
               <a:t>Continuity</a:t>
             </a:r>
             <a:br/>
             <a:r>
+              <a:rPr/>
               <a:t>継続性</a:t>
             </a:r>
           </a:p>
@@ -8389,10 +8546,12 @@
               </a:defRPr>
             </a:pPr>
             <a:r>
+              <a:rPr/>
               <a:t>同じ医師が長期的に</a:t>
             </a:r>
             <a:br/>
             <a:r>
+              <a:rPr/>
               <a:t>一人の患者を診る</a:t>
             </a:r>
           </a:p>
@@ -8439,7 +8598,9 @@
           <a:bodyPr rtlCol="0" anchor="ctr"/>
           <a:lstStyle/>
           <a:p>
-            <a:pPr algn="ctr"/>
+            <a:pPr algn="ctr">
+              <a:defRPr/>
+            </a:pPr>
           </a:p>
         </p:txBody>
       </p:sp>
@@ -8482,7 +8643,9 @@
           <a:bodyPr rtlCol="0" anchor="ctr"/>
           <a:lstStyle/>
           <a:p>
-            <a:pPr algn="ctr"/>
+            <a:pPr algn="ctr">
+              <a:defRPr/>
+            </a:pPr>
           </a:p>
         </p:txBody>
       </p:sp>
@@ -8494,7 +8657,7 @@
         </p:nvSpPr>
         <p:spPr>
           <a:xfrm>
-            <a:off x="4846320" y="1097280"/>
+            <a:off x="4846320" y="1133854"/>
             <a:ext cx="1783080" cy="640080"/>
           </a:xfrm>
           <a:prstGeom prst="rect">
@@ -8517,10 +8680,12 @@
               </a:defRPr>
             </a:pPr>
             <a:r>
+              <a:rPr/>
               <a:t>Comprehensiveness</a:t>
             </a:r>
             <a:br/>
             <a:r>
+              <a:rPr/>
               <a:t>包括性</a:t>
             </a:r>
           </a:p>
@@ -8557,10 +8722,12 @@
               </a:defRPr>
             </a:pPr>
             <a:r>
+              <a:rPr/>
               <a:t>幅広い問題に</a:t>
             </a:r>
             <a:br/>
             <a:r>
+              <a:rPr/>
               <a:t>対応できる</a:t>
             </a:r>
           </a:p>
@@ -8607,7 +8774,9 @@
           <a:bodyPr rtlCol="0" anchor="ctr"/>
           <a:lstStyle/>
           <a:p>
-            <a:pPr algn="ctr"/>
+            <a:pPr algn="ctr">
+              <a:defRPr/>
+            </a:pPr>
           </a:p>
         </p:txBody>
       </p:sp>
@@ -8650,7 +8819,9 @@
           <a:bodyPr rtlCol="0" anchor="ctr"/>
           <a:lstStyle/>
           <a:p>
-            <a:pPr algn="ctr"/>
+            <a:pPr algn="ctr">
+              <a:defRPr/>
+            </a:pPr>
           </a:p>
         </p:txBody>
       </p:sp>
@@ -8685,10 +8856,12 @@
               </a:defRPr>
             </a:pPr>
             <a:r>
+              <a:rPr/>
               <a:t>Coordination</a:t>
             </a:r>
             <a:br/>
             <a:r>
+              <a:rPr/>
               <a:t>調整機能</a:t>
             </a:r>
           </a:p>
@@ -8725,10 +8898,12 @@
               </a:defRPr>
             </a:pPr>
             <a:r>
+              <a:rPr/>
               <a:t>専門医との連携を</a:t>
             </a:r>
             <a:br/>
             <a:r>
+              <a:rPr/>
               <a:t>統合する</a:t>
             </a:r>
           </a:p>
@@ -8765,6 +8940,7 @@
               </a:defRPr>
             </a:pPr>
             <a:r>
+              <a:rPr/>
               <a:t>AIのオーケストレーター = 「Coordination」の役割。家庭医 = 4つ全てを担う「システムの専門医」</a:t>
             </a:r>
           </a:p>
@@ -8805,7 +8981,7 @@
         <p:spPr>
           <a:xfrm>
             <a:off x="731520" y="274320"/>
-            <a:ext cx="7315200" cy="457200"/>
+            <a:ext cx="7315200" cy="589279"/>
           </a:xfrm>
           <a:prstGeom prst="rect">
             <a:avLst/>
@@ -8827,6 +9003,7 @@
               </a:defRPr>
             </a:pPr>
             <a:r>
+              <a:rPr/>
               <a:t>ディスカッション</a:t>
             </a:r>
           </a:p>
@@ -8840,8 +9017,8 @@
         </p:nvSpPr>
         <p:spPr>
           <a:xfrm>
-            <a:off x="731520" y="731520"/>
-            <a:ext cx="2743200" cy="320040"/>
+            <a:off x="731520" y="881887"/>
+            <a:ext cx="2743200" cy="340360"/>
           </a:xfrm>
           <a:prstGeom prst="rect">
             <a:avLst/>
@@ -8863,6 +9040,7 @@
               </a:defRPr>
             </a:pPr>
             <a:r>
+              <a:rPr/>
               <a:t>4分間 → 全体共有 3分</a:t>
             </a:r>
           </a:p>
@@ -8907,7 +9085,9 @@
           <a:bodyPr rtlCol="0" anchor="ctr"/>
           <a:lstStyle/>
           <a:p>
-            <a:pPr algn="ctr"/>
+            <a:pPr algn="ctr">
+              <a:defRPr/>
+            </a:pPr>
           </a:p>
         </p:txBody>
       </p:sp>
@@ -8952,7 +9132,9 @@
           <a:bodyPr rtlCol="0" anchor="ctr"/>
           <a:lstStyle/>
           <a:p>
-            <a:pPr algn="ctr"/>
+            <a:pPr algn="ctr">
+              <a:defRPr/>
+            </a:pPr>
           </a:p>
         </p:txBody>
       </p:sp>
@@ -8987,14 +9169,17 @@
               </a:defRPr>
             </a:pPr>
             <a:r>
+              <a:rPr/>
               <a:t>あなたの現場で、「オーケストレーターが</a:t>
             </a:r>
             <a:br/>
             <a:r>
+              <a:rPr/>
               <a:t>いないせいで起きている問題」は何か？</a:t>
             </a:r>
             <a:br/>
             <a:r>
+              <a:rPr/>
               <a:t>それを解決するには何が必要？</a:t>
             </a:r>
           </a:p>
@@ -9009,7 +9194,7 @@
         <p:spPr>
           <a:xfrm>
             <a:off x="731520" y="2468880"/>
-            <a:ext cx="2743200" cy="274320"/>
+            <a:ext cx="2743200" cy="340360"/>
           </a:xfrm>
           <a:prstGeom prst="rect">
             <a:avLst/>
@@ -9031,6 +9216,7 @@
               </a:defRPr>
             </a:pPr>
             <a:r>
+              <a:rPr/>
               <a:t>考えるヒント</a:t>
             </a:r>
           </a:p>
@@ -9044,7 +9230,7 @@
         </p:nvSpPr>
         <p:spPr>
           <a:xfrm>
-            <a:off x="731520" y="2788920"/>
+            <a:off x="731520" y="2827528"/>
             <a:ext cx="7680960" cy="1645920"/>
           </a:xfrm>
           <a:prstGeom prst="rect">
@@ -9068,6 +9254,7 @@
               <a:buChar char="●"/>
             </a:pPr>
             <a:r>
+              <a:rPr/>
               <a:t>ポリドクタリングで困った患者さんの経験は？</a:t>
             </a:r>
           </a:p>
@@ -9082,6 +9269,7 @@
               <a:buChar char="●"/>
             </a:pPr>
             <a:r>
+              <a:rPr/>
               <a:t>「全体を見る人」がいたら何が変わる？</a:t>
             </a:r>
           </a:p>
@@ -9096,6 +9284,7 @@
               <a:buChar char="●"/>
             </a:pPr>
             <a:r>
+              <a:rPr/>
               <a:t>日本のフリーアクセス制度をどう思う？</a:t>
             </a:r>
           </a:p>
